--- a/icons.pptx
+++ b/icons.pptx
@@ -104,6 +104,11 @@
       </a:defRPr>
     </a:lvl9pPr>
   </p:defaultTextStyle>
+  <p:extLst>
+    <p:ext uri="{EFAFB233-063F-42B5-8137-9DF3F51BA10A}">
+      <p15:sldGuideLst xmlns:p15="http://schemas.microsoft.com/office/powerpoint/2012/main"/>
+    </p:ext>
+  </p:extLst>
 </p:presentation>
 </file>
 
@@ -254,7 +259,7 @@
           <a:p>
             <a:fld id="{956073C0-D20C-CE46-B2F4-7C90438CE5FF}" type="datetimeFigureOut">
               <a:rPr lang="de-DE" smtClean="0"/>
-              <a:t>02.04.26</a:t>
+              <a:t>03.04.26</a:t>
             </a:fld>
             <a:endParaRPr lang="de-DE"/>
           </a:p>
@@ -452,7 +457,7 @@
           <a:p>
             <a:fld id="{956073C0-D20C-CE46-B2F4-7C90438CE5FF}" type="datetimeFigureOut">
               <a:rPr lang="de-DE" smtClean="0"/>
-              <a:t>02.04.26</a:t>
+              <a:t>03.04.26</a:t>
             </a:fld>
             <a:endParaRPr lang="de-DE"/>
           </a:p>
@@ -660,7 +665,7 @@
           <a:p>
             <a:fld id="{956073C0-D20C-CE46-B2F4-7C90438CE5FF}" type="datetimeFigureOut">
               <a:rPr lang="de-DE" smtClean="0"/>
-              <a:t>02.04.26</a:t>
+              <a:t>03.04.26</a:t>
             </a:fld>
             <a:endParaRPr lang="de-DE"/>
           </a:p>
@@ -858,7 +863,7 @@
           <a:p>
             <a:fld id="{956073C0-D20C-CE46-B2F4-7C90438CE5FF}" type="datetimeFigureOut">
               <a:rPr lang="de-DE" smtClean="0"/>
-              <a:t>02.04.26</a:t>
+              <a:t>03.04.26</a:t>
             </a:fld>
             <a:endParaRPr lang="de-DE"/>
           </a:p>
@@ -1133,7 +1138,7 @@
           <a:p>
             <a:fld id="{956073C0-D20C-CE46-B2F4-7C90438CE5FF}" type="datetimeFigureOut">
               <a:rPr lang="de-DE" smtClean="0"/>
-              <a:t>02.04.26</a:t>
+              <a:t>03.04.26</a:t>
             </a:fld>
             <a:endParaRPr lang="de-DE"/>
           </a:p>
@@ -1398,7 +1403,7 @@
           <a:p>
             <a:fld id="{956073C0-D20C-CE46-B2F4-7C90438CE5FF}" type="datetimeFigureOut">
               <a:rPr lang="de-DE" smtClean="0"/>
-              <a:t>02.04.26</a:t>
+              <a:t>03.04.26</a:t>
             </a:fld>
             <a:endParaRPr lang="de-DE"/>
           </a:p>
@@ -1810,7 +1815,7 @@
           <a:p>
             <a:fld id="{956073C0-D20C-CE46-B2F4-7C90438CE5FF}" type="datetimeFigureOut">
               <a:rPr lang="de-DE" smtClean="0"/>
-              <a:t>02.04.26</a:t>
+              <a:t>03.04.26</a:t>
             </a:fld>
             <a:endParaRPr lang="de-DE"/>
           </a:p>
@@ -1951,7 +1956,7 @@
           <a:p>
             <a:fld id="{956073C0-D20C-CE46-B2F4-7C90438CE5FF}" type="datetimeFigureOut">
               <a:rPr lang="de-DE" smtClean="0"/>
-              <a:t>02.04.26</a:t>
+              <a:t>03.04.26</a:t>
             </a:fld>
             <a:endParaRPr lang="de-DE"/>
           </a:p>
@@ -2064,7 +2069,7 @@
           <a:p>
             <a:fld id="{956073C0-D20C-CE46-B2F4-7C90438CE5FF}" type="datetimeFigureOut">
               <a:rPr lang="de-DE" smtClean="0"/>
-              <a:t>02.04.26</a:t>
+              <a:t>03.04.26</a:t>
             </a:fld>
             <a:endParaRPr lang="de-DE"/>
           </a:p>
@@ -2375,7 +2380,7 @@
           <a:p>
             <a:fld id="{956073C0-D20C-CE46-B2F4-7C90438CE5FF}" type="datetimeFigureOut">
               <a:rPr lang="de-DE" smtClean="0"/>
-              <a:t>02.04.26</a:t>
+              <a:t>03.04.26</a:t>
             </a:fld>
             <a:endParaRPr lang="de-DE"/>
           </a:p>
@@ -2663,7 +2668,7 @@
           <a:p>
             <a:fld id="{956073C0-D20C-CE46-B2F4-7C90438CE5FF}" type="datetimeFigureOut">
               <a:rPr lang="de-DE" smtClean="0"/>
-              <a:t>02.04.26</a:t>
+              <a:t>03.04.26</a:t>
             </a:fld>
             <a:endParaRPr lang="de-DE"/>
           </a:p>
@@ -2904,7 +2909,7 @@
           <a:p>
             <a:fld id="{956073C0-D20C-CE46-B2F4-7C90438CE5FF}" type="datetimeFigureOut">
               <a:rPr lang="de-DE" smtClean="0"/>
-              <a:t>02.04.26</a:t>
+              <a:t>03.04.26</a:t>
             </a:fld>
             <a:endParaRPr lang="de-DE"/>
           </a:p>
@@ -3649,6 +3654,96 @@
           </a:fontRef>
         </p:style>
       </p:cxnSp>
+      <p:pic>
+        <p:nvPicPr>
+          <p:cNvPr id="3" name="Grafik 2" descr="Ein Bild, das Symbol, Logo, Kreis, Schrift enthält.&#10;&#10;KI-generierte Inhalte können fehlerhaft sein.">
+            <a:extLst>
+              <a:ext uri="{FF2B5EF4-FFF2-40B4-BE49-F238E27FC236}">
+                <a16:creationId xmlns:a16="http://schemas.microsoft.com/office/drawing/2014/main" id="{4DEE0C8E-50DC-ABF5-4F32-9389F106DCF6}"/>
+              </a:ext>
+            </a:extLst>
+          </p:cNvPr>
+          <p:cNvPicPr>
+            <a:picLocks noChangeAspect="1"/>
+          </p:cNvPicPr>
+          <p:nvPr/>
+        </p:nvPicPr>
+        <p:blipFill>
+          <a:blip r:embed="rId2"/>
+          <a:stretch>
+            <a:fillRect/>
+          </a:stretch>
+        </p:blipFill>
+        <p:spPr>
+          <a:xfrm>
+            <a:off x="4067810" y="2506720"/>
+            <a:ext cx="1879600" cy="1879600"/>
+          </a:xfrm>
+          <a:prstGeom prst="rect">
+            <a:avLst/>
+          </a:prstGeom>
+        </p:spPr>
+      </p:pic>
+      <p:pic>
+        <p:nvPicPr>
+          <p:cNvPr id="6" name="Grafik 5" descr="Ein Bild, das Symbol, Logo, Kreis, Grafiken enthält.&#10;&#10;KI-generierte Inhalte können fehlerhaft sein.">
+            <a:extLst>
+              <a:ext uri="{FF2B5EF4-FFF2-40B4-BE49-F238E27FC236}">
+                <a16:creationId xmlns:a16="http://schemas.microsoft.com/office/drawing/2014/main" id="{7B770F2F-12F5-BA7C-2B81-E9EFCA624AE1}"/>
+              </a:ext>
+            </a:extLst>
+          </p:cNvPr>
+          <p:cNvPicPr>
+            <a:picLocks noChangeAspect="1"/>
+          </p:cNvPicPr>
+          <p:nvPr/>
+        </p:nvPicPr>
+        <p:blipFill>
+          <a:blip r:embed="rId3"/>
+          <a:stretch>
+            <a:fillRect/>
+          </a:stretch>
+        </p:blipFill>
+        <p:spPr>
+          <a:xfrm>
+            <a:off x="6707061" y="2489200"/>
+            <a:ext cx="1879600" cy="1879600"/>
+          </a:xfrm>
+          <a:prstGeom prst="rect">
+            <a:avLst/>
+          </a:prstGeom>
+        </p:spPr>
+      </p:pic>
+      <p:pic>
+        <p:nvPicPr>
+          <p:cNvPr id="13" name="Grafik 12" descr="Ein Bild, das Symbol, Logo, Kreis, Grafiken enthält.&#10;&#10;KI-generierte Inhalte können fehlerhaft sein.">
+            <a:extLst>
+              <a:ext uri="{FF2B5EF4-FFF2-40B4-BE49-F238E27FC236}">
+                <a16:creationId xmlns:a16="http://schemas.microsoft.com/office/drawing/2014/main" id="{F293064B-3DE8-F483-9F6B-E8F45DD47007}"/>
+              </a:ext>
+            </a:extLst>
+          </p:cNvPr>
+          <p:cNvPicPr>
+            <a:picLocks noChangeAspect="1"/>
+          </p:cNvPicPr>
+          <p:nvPr/>
+        </p:nvPicPr>
+        <p:blipFill>
+          <a:blip r:embed="rId4"/>
+          <a:stretch>
+            <a:fillRect/>
+          </a:stretch>
+        </p:blipFill>
+        <p:spPr>
+          <a:xfrm>
+            <a:off x="3917872" y="1968718"/>
+            <a:ext cx="1879600" cy="1879600"/>
+          </a:xfrm>
+          <a:prstGeom prst="rect">
+            <a:avLst/>
+          </a:prstGeom>
+        </p:spPr>
+      </p:pic>
     </p:spTree>
     <p:extLst>
       <p:ext uri="{BB962C8B-B14F-4D97-AF65-F5344CB8AC3E}">
